--- a/wwwroot/1-FourPlatformLevelsofUniversalProgrammingLanguage.pptx
+++ b/wwwroot/1-FourPlatformLevelsofUniversalProgrammingLanguage.pptx
@@ -244,7 +244,7 @@
           <a:p>
             <a:fld id="{0F9B84EA-7D68-4D60-9CB1-D50884785D1C}" type="datetimeFigureOut">
               <a:rPr lang="zh-CN" altLang="en-US" smtClean="0"/>
-              <a:t>2023/3/11</a:t>
+              <a:t>2023/3/18</a:t>
             </a:fld>
             <a:endParaRPr lang="zh-CN" altLang="en-US"/>
           </a:p>
@@ -409,7 +409,7 @@
           <a:p>
             <a:fld id="{D2A48B96-639E-45A3-A0BA-2464DFDB1FAA}" type="datetimeFigureOut">
               <a:rPr lang="zh-CN" altLang="en-US" smtClean="0"/>
-              <a:t>2023/3/11</a:t>
+              <a:t>2023/3/18</a:t>
             </a:fld>
             <a:endParaRPr lang="zh-CN" altLang="en-US"/>
           </a:p>
@@ -2041,7 +2041,7 @@
           <a:p>
             <a:fld id="{82F288E0-7875-42C4-84C8-98DBBD3BF4D2}" type="datetimeFigureOut">
               <a:rPr lang="zh-CN" altLang="en-US" smtClean="0"/>
-              <a:t>2023/3/11</a:t>
+              <a:t>2023/3/18</a:t>
             </a:fld>
             <a:endParaRPr lang="zh-CN" altLang="en-US"/>
           </a:p>
@@ -2199,7 +2199,7 @@
           <a:p>
             <a:fld id="{82F288E0-7875-42C4-84C8-98DBBD3BF4D2}" type="datetimeFigureOut">
               <a:rPr lang="zh-CN" altLang="en-US" smtClean="0"/>
-              <a:t>2023/3/11</a:t>
+              <a:t>2023/3/18</a:t>
             </a:fld>
             <a:endParaRPr lang="zh-CN" altLang="en-US"/>
           </a:p>
@@ -2538,7 +2538,7 @@
           <a:p>
             <a:fld id="{82F288E0-7875-42C4-84C8-98DBBD3BF4D2}" type="datetimeFigureOut">
               <a:rPr lang="zh-CN" altLang="en-US" smtClean="0"/>
-              <a:t>2023/3/11</a:t>
+              <a:t>2023/3/18</a:t>
             </a:fld>
             <a:endParaRPr lang="zh-CN" altLang="en-US"/>
           </a:p>
@@ -2774,7 +2774,7 @@
           <a:p>
             <a:fld id="{82F288E0-7875-42C4-84C8-98DBBD3BF4D2}" type="datetimeFigureOut">
               <a:rPr lang="zh-CN" altLang="en-US" smtClean="0"/>
-              <a:t>2023/3/11</a:t>
+              <a:t>2023/3/18</a:t>
             </a:fld>
             <a:endParaRPr lang="zh-CN" altLang="en-US"/>
           </a:p>
@@ -3145,7 +3145,7 @@
           <a:p>
             <a:fld id="{82F288E0-7875-42C4-84C8-98DBBD3BF4D2}" type="datetimeFigureOut">
               <a:rPr lang="zh-CN" altLang="en-US" smtClean="0"/>
-              <a:t>2023/3/11</a:t>
+              <a:t>2023/3/18</a:t>
             </a:fld>
             <a:endParaRPr lang="zh-CN" altLang="en-US"/>
           </a:p>
@@ -3269,7 +3269,7 @@
           <a:p>
             <a:fld id="{82F288E0-7875-42C4-84C8-98DBBD3BF4D2}" type="datetimeFigureOut">
               <a:rPr lang="zh-CN" altLang="en-US" smtClean="0"/>
-              <a:t>2023/3/11</a:t>
+              <a:t>2023/3/18</a:t>
             </a:fld>
             <a:endParaRPr lang="zh-CN" altLang="en-US"/>
           </a:p>
@@ -3371,7 +3371,7 @@
           <a:p>
             <a:fld id="{82F288E0-7875-42C4-84C8-98DBBD3BF4D2}" type="datetimeFigureOut">
               <a:rPr lang="zh-CN" altLang="en-US" smtClean="0"/>
-              <a:t>2023/3/11</a:t>
+              <a:t>2023/3/18</a:t>
             </a:fld>
             <a:endParaRPr lang="zh-CN" altLang="en-US"/>
           </a:p>
@@ -3630,7 +3630,7 @@
           <a:p>
             <a:fld id="{82F288E0-7875-42C4-84C8-98DBBD3BF4D2}" type="datetimeFigureOut">
               <a:rPr lang="zh-CN" altLang="en-US" smtClean="0"/>
-              <a:t>2023/3/11</a:t>
+              <a:t>2023/3/18</a:t>
             </a:fld>
             <a:endParaRPr lang="zh-CN" altLang="en-US"/>
           </a:p>
@@ -3815,7 +3815,7 @@
           <a:p>
             <a:fld id="{82F288E0-7875-42C4-84C8-98DBBD3BF4D2}" type="datetimeFigureOut">
               <a:rPr lang="zh-CN" altLang="en-US" smtClean="0"/>
-              <a:t>2023/3/11</a:t>
+              <a:t>2023/3/18</a:t>
             </a:fld>
             <a:endParaRPr lang="zh-CN" altLang="en-US"/>
           </a:p>
@@ -4042,7 +4042,7 @@
           <a:p>
             <a:fld id="{82F288E0-7875-42C4-84C8-98DBBD3BF4D2}" type="datetimeFigureOut">
               <a:rPr lang="zh-CN" altLang="en-US" smtClean="0"/>
-              <a:t>2023/3/11</a:t>
+              <a:t>2023/3/18</a:t>
             </a:fld>
             <a:endParaRPr lang="zh-CN" altLang="en-US"/>
           </a:p>
@@ -4941,19 +4941,51 @@
         </p:nvSpPr>
         <p:spPr>
           <a:xfrm>
-            <a:off x="5525544" y="4431321"/>
-            <a:ext cx="3057247" cy="307777"/>
+            <a:off x="3452775" y="4431321"/>
+            <a:ext cx="5210484" cy="307777"/>
           </a:xfrm>
           <a:prstGeom prst="rect">
             <a:avLst/>
           </a:prstGeom>
         </p:spPr>
         <p:txBody>
-          <a:bodyPr wrap="none">
+          <a:bodyPr wrap="square">
             <a:spAutoFit/>
           </a:bodyPr>
           <a:lstStyle/>
           <a:p>
+            <a:r>
+              <a:rPr lang="en-US" altLang="zh-CN" dirty="0"/>
+              <a:t>【</a:t>
+            </a:r>
+            <a:r>
+              <a:rPr lang="zh-CN" altLang="en-US" dirty="0"/>
+              <a:t>模型</a:t>
+            </a:r>
+            <a:r>
+              <a:rPr lang="en-US" altLang="zh-CN" dirty="0"/>
+              <a:t>M</a:t>
+            </a:r>
+            <a:r>
+              <a:rPr lang="zh-CN" altLang="en-US" dirty="0"/>
+              <a:t>：人文</a:t>
+            </a:r>
+            <a:r>
+              <a:rPr lang="en-US" dirty="0"/>
+              <a:t>(</a:t>
+            </a:r>
+            <a:r>
+              <a:rPr lang="zh-CN" altLang="en-US" dirty="0"/>
+              <a:t>情感交流</a:t>
+            </a:r>
+            <a:r>
+              <a:rPr lang="en-US" dirty="0"/>
+              <a:t>) </a:t>
+            </a:r>
+            <a:r>
+              <a:rPr lang="en-US" altLang="zh-CN" dirty="0"/>
+              <a:t>】 </a:t>
+            </a:r>
             <a:r>
               <a:rPr lang="zh-CN" altLang="en-US" kern="100" dirty="0" smtClean="0">
                 <a:latin typeface="Calibri" panose="020F0502020204030204" pitchFamily="34" charset="0"/>
@@ -5300,8 +5332,8 @@
         </p:nvSpPr>
         <p:spPr>
           <a:xfrm>
-            <a:off x="5493794" y="459528"/>
-            <a:ext cx="3057247" cy="307777"/>
+            <a:off x="3562581" y="425335"/>
+            <a:ext cx="5399235" cy="307777"/>
           </a:xfrm>
           <a:prstGeom prst="rect">
             <a:avLst/>
@@ -5313,6 +5345,42 @@
           </a:bodyPr>
           <a:lstStyle/>
           <a:p>
+            <a:r>
+              <a:rPr lang="en-US" altLang="zh-CN" dirty="0"/>
+              <a:t>【</a:t>
+            </a:r>
+            <a:r>
+              <a:rPr lang="zh-CN" altLang="en-US" dirty="0"/>
+              <a:t>模型</a:t>
+            </a:r>
+            <a:r>
+              <a:rPr lang="en-US" altLang="zh-CN" dirty="0"/>
+              <a:t>M</a:t>
+            </a:r>
+            <a:r>
+              <a:rPr lang="zh-CN" altLang="en-US" dirty="0" smtClean="0"/>
+              <a:t>：</a:t>
+            </a:r>
+            <a:r>
+              <a:rPr lang="zh-CN" altLang="en-US" dirty="0"/>
+              <a:t>哲学</a:t>
+            </a:r>
+            <a:r>
+              <a:rPr lang="en-US" dirty="0" smtClean="0"/>
+              <a:t>(</a:t>
+            </a:r>
+            <a:r>
+              <a:rPr lang="zh-CN" altLang="en-US" dirty="0" smtClean="0"/>
+              <a:t>智能建构</a:t>
+            </a:r>
+            <a:r>
+              <a:rPr lang="en-US" dirty="0" smtClean="0"/>
+              <a:t>) </a:t>
+            </a:r>
+            <a:r>
+              <a:rPr lang="en-US" altLang="zh-CN" dirty="0" smtClean="0"/>
+              <a:t>】</a:t>
+            </a:r>
             <a:r>
               <a:rPr lang="zh-CN" altLang="en-US" kern="100" dirty="0" smtClean="0">
                 <a:latin typeface="Calibri" panose="020F0502020204030204" pitchFamily="34" charset="0"/>
@@ -5444,7 +5512,7 @@
           <p:cNvPr id="2" name="文本框 1">
             <a:extLst>
               <a:ext uri="{FF2B5EF4-FFF2-40B4-BE49-F238E27FC236}">
-                <a16:creationId xmlns="" xmlns:a16="http://schemas.microsoft.com/office/drawing/2014/main" id="{438813D7-676E-4BB1-8BD1-AA790C109740}"/>
+                <a16:creationId xmlns:a16="http://schemas.microsoft.com/office/drawing/2014/main" xmlns="" id="{438813D7-676E-4BB1-8BD1-AA790C109740}"/>
               </a:ext>
             </a:extLst>
           </p:cNvPr>
@@ -5453,8 +5521,8 @@
         </p:nvSpPr>
         <p:spPr>
           <a:xfrm>
-            <a:off x="4927600" y="4551431"/>
-            <a:ext cx="3829050" cy="307777"/>
+            <a:off x="2670047" y="4551431"/>
+            <a:ext cx="6291428" cy="307777"/>
           </a:xfrm>
           <a:prstGeom prst="rect">
             <a:avLst/>
@@ -5468,8 +5536,44 @@
           <a:lstStyle/>
           <a:p>
             <a:r>
+              <a:rPr lang="en-US" altLang="zh-CN" dirty="0"/>
+              <a:t>【</a:t>
+            </a:r>
+            <a:r>
+              <a:rPr lang="zh-CN" altLang="en-US" dirty="0"/>
+              <a:t>模型</a:t>
+            </a:r>
+            <a:r>
+              <a:rPr lang="en-US" altLang="zh-CN" dirty="0"/>
+              <a:t>M</a:t>
+            </a:r>
+            <a:r>
+              <a:rPr lang="zh-CN" altLang="en-US" dirty="0"/>
+              <a:t>：实践</a:t>
+            </a:r>
+            <a:r>
+              <a:rPr lang="en-US" dirty="0"/>
+              <a:t>(</a:t>
+            </a:r>
+            <a:r>
+              <a:rPr lang="zh-CN" altLang="en-US" dirty="0"/>
+              <a:t>数据读写</a:t>
+            </a:r>
+            <a:r>
+              <a:rPr lang="en-US" dirty="0"/>
+              <a:t>) </a:t>
+            </a:r>
+            <a:r>
+              <a:rPr lang="en-US" altLang="zh-CN" dirty="0" smtClean="0"/>
+              <a:t>】</a:t>
+            </a:r>
+            <a:r>
               <a:rPr lang="zh-CN" altLang="en-US" dirty="0" smtClean="0"/>
-              <a:t>（思政要素：学</a:t>
+              <a:t>（</a:t>
+            </a:r>
+            <a:r>
+              <a:rPr lang="zh-CN" altLang="en-US" dirty="0" smtClean="0"/>
+              <a:t>思政要素：学</a:t>
             </a:r>
             <a:r>
               <a:rPr lang="zh-CN" altLang="en-US" dirty="0"/>
@@ -6067,7 +6171,7 @@
           <a:graphicData uri="http://schemas.openxmlformats.org/presentationml/2006/ole">
             <mc:AlternateContent xmlns:mc="http://schemas.openxmlformats.org/markup-compatibility/2006">
               <mc:Choice xmlns:v="urn:schemas-microsoft-com:vml" Requires="v">
-                <p:oleObj spid="_x0000_s4113" name="Picture" r:id="rId3" imgW="2441520" imgH="3979440" progId="Word.Picture.8">
+                <p:oleObj spid="_x0000_s4116" name="Picture" r:id="rId3" imgW="2441520" imgH="3979440" progId="Word.Picture.8">
                   <p:embed/>
                 </p:oleObj>
               </mc:Choice>
@@ -6259,19 +6363,55 @@
         </p:nvSpPr>
         <p:spPr>
           <a:xfrm>
-            <a:off x="5689951" y="4611588"/>
-            <a:ext cx="3057247" cy="307777"/>
+            <a:off x="3445459" y="4611588"/>
+            <a:ext cx="5265164" cy="307777"/>
           </a:xfrm>
           <a:prstGeom prst="rect">
             <a:avLst/>
           </a:prstGeom>
         </p:spPr>
         <p:txBody>
-          <a:bodyPr wrap="none">
+          <a:bodyPr wrap="square">
             <a:spAutoFit/>
           </a:bodyPr>
           <a:lstStyle/>
           <a:p>
+            <a:r>
+              <a:rPr lang="en-US" altLang="zh-CN" dirty="0"/>
+              <a:t>【</a:t>
+            </a:r>
+            <a:r>
+              <a:rPr lang="zh-CN" altLang="en-US" dirty="0"/>
+              <a:t>模型</a:t>
+            </a:r>
+            <a:r>
+              <a:rPr lang="en-US" altLang="zh-CN" dirty="0"/>
+              <a:t>M</a:t>
+            </a:r>
+            <a:r>
+              <a:rPr lang="zh-CN" altLang="en-US" dirty="0" smtClean="0"/>
+              <a:t>：</a:t>
+            </a:r>
+            <a:r>
+              <a:rPr lang="zh-CN" altLang="en-US" dirty="0"/>
+              <a:t>人文</a:t>
+            </a:r>
+            <a:r>
+              <a:rPr lang="en-US" dirty="0" smtClean="0"/>
+              <a:t>(</a:t>
+            </a:r>
+            <a:r>
+              <a:rPr lang="zh-CN" altLang="en-US" dirty="0" smtClean="0"/>
+              <a:t>情感交流</a:t>
+            </a:r>
+            <a:r>
+              <a:rPr lang="en-US" dirty="0" smtClean="0"/>
+              <a:t>) </a:t>
+            </a:r>
+            <a:r>
+              <a:rPr lang="en-US" altLang="zh-CN" dirty="0"/>
+              <a:t>】 </a:t>
+            </a:r>
             <a:r>
               <a:rPr lang="zh-CN" altLang="en-US" kern="100" dirty="0" smtClean="0">
                 <a:latin typeface="Calibri" panose="020F0502020204030204" pitchFamily="34" charset="0"/>
@@ -6356,7 +6496,7 @@
         </p:nvSpPr>
         <p:spPr>
           <a:xfrm>
-            <a:off x="580032" y="631513"/>
+            <a:off x="580032" y="564769"/>
             <a:ext cx="5046068" cy="369332"/>
           </a:xfrm>
           <a:prstGeom prst="rect">
@@ -6392,7 +6532,7 @@
         </p:nvSpPr>
         <p:spPr>
           <a:xfrm>
-            <a:off x="580032" y="1271398"/>
+            <a:off x="580032" y="1190434"/>
             <a:ext cx="3960218" cy="3508653"/>
           </a:xfrm>
           <a:prstGeom prst="rect">
@@ -6831,7 +6971,7 @@
           <a:graphicData uri="http://schemas.openxmlformats.org/presentationml/2006/ole">
             <mc:AlternateContent xmlns:mc="http://schemas.openxmlformats.org/markup-compatibility/2006">
               <mc:Choice xmlns:v="urn:schemas-microsoft-com:vml" Requires="v">
-                <p:oleObj spid="_x0000_s2081" name="Picture" r:id="rId4" imgW="2441520" imgH="3979440" progId="Word.Picture.8">
+                <p:oleObj spid="_x0000_s2084" name="Picture" r:id="rId4" imgW="2441520" imgH="3979440" progId="Word.Picture.8">
                   <p:embed/>
                 </p:oleObj>
               </mc:Choice>
@@ -6909,19 +7049,51 @@
         </p:nvSpPr>
         <p:spPr>
           <a:xfrm>
-            <a:off x="4470400" y="4594288"/>
-            <a:ext cx="4572000" cy="307777"/>
+            <a:off x="2384820" y="4601603"/>
+            <a:ext cx="6676058" cy="307777"/>
           </a:xfrm>
           <a:prstGeom prst="rect">
             <a:avLst/>
           </a:prstGeom>
         </p:spPr>
         <p:txBody>
-          <a:bodyPr>
+          <a:bodyPr wrap="square">
             <a:spAutoFit/>
           </a:bodyPr>
           <a:lstStyle/>
           <a:p>
+            <a:r>
+              <a:rPr lang="en-US" altLang="zh-CN" dirty="0" smtClean="0"/>
+              <a:t>【</a:t>
+            </a:r>
+            <a:r>
+              <a:rPr lang="zh-CN" altLang="en-US" dirty="0" smtClean="0"/>
+              <a:t>模型</a:t>
+            </a:r>
+            <a:r>
+              <a:rPr lang="en-US" altLang="zh-CN" dirty="0" smtClean="0"/>
+              <a:t>M</a:t>
+            </a:r>
+            <a:r>
+              <a:rPr lang="zh-CN" altLang="en-US" dirty="0" smtClean="0"/>
+              <a:t>：科学</a:t>
+            </a:r>
+            <a:r>
+              <a:rPr lang="en-US" dirty="0"/>
+              <a:t>(</a:t>
+            </a:r>
+            <a:r>
+              <a:rPr lang="zh-CN" altLang="en-US" dirty="0"/>
+              <a:t>规律探究</a:t>
+            </a:r>
+            <a:r>
+              <a:rPr lang="en-US" dirty="0" smtClean="0"/>
+              <a:t>) </a:t>
+            </a:r>
+            <a:r>
+              <a:rPr lang="en-US" altLang="zh-CN" dirty="0" smtClean="0"/>
+              <a:t>】</a:t>
+            </a:r>
             <a:r>
               <a:rPr lang="zh-CN" altLang="en-US" kern="100" dirty="0" smtClean="0">
                 <a:latin typeface="Calibri" panose="020F0502020204030204" pitchFamily="34" charset="0"/>
@@ -7531,8 +7703,8 @@
         </p:nvSpPr>
         <p:spPr>
           <a:xfrm>
-            <a:off x="5633494" y="4394039"/>
-            <a:ext cx="3057247" cy="307777"/>
+            <a:off x="3497456" y="4394039"/>
+            <a:ext cx="5578771" cy="307777"/>
           </a:xfrm>
           <a:prstGeom prst="rect">
             <a:avLst/>
@@ -7544,6 +7716,42 @@
           </a:bodyPr>
           <a:lstStyle/>
           <a:p>
+            <a:r>
+              <a:rPr lang="en-US" altLang="zh-CN" dirty="0"/>
+              <a:t>【</a:t>
+            </a:r>
+            <a:r>
+              <a:rPr lang="zh-CN" altLang="en-US" dirty="0"/>
+              <a:t>模型</a:t>
+            </a:r>
+            <a:r>
+              <a:rPr lang="en-US" altLang="zh-CN" dirty="0"/>
+              <a:t>M</a:t>
+            </a:r>
+            <a:r>
+              <a:rPr lang="zh-CN" altLang="en-US" dirty="0" smtClean="0"/>
+              <a:t>：</a:t>
+            </a:r>
+            <a:r>
+              <a:rPr lang="zh-CN" altLang="en-US" dirty="0"/>
+              <a:t>实践</a:t>
+            </a:r>
+            <a:r>
+              <a:rPr lang="en-US" dirty="0" smtClean="0"/>
+              <a:t>(</a:t>
+            </a:r>
+            <a:r>
+              <a:rPr lang="zh-CN" altLang="en-US" dirty="0" smtClean="0"/>
+              <a:t>数据读写</a:t>
+            </a:r>
+            <a:r>
+              <a:rPr lang="en-US" dirty="0" smtClean="0"/>
+              <a:t>) </a:t>
+            </a:r>
+            <a:r>
+              <a:rPr lang="en-US" altLang="zh-CN" dirty="0"/>
+              <a:t>】 </a:t>
+            </a:r>
             <a:r>
               <a:rPr lang="zh-CN" altLang="en-US" kern="100" dirty="0" smtClean="0">
                 <a:latin typeface="Calibri" panose="020F0502020204030204" pitchFamily="34" charset="0"/>
@@ -8477,8 +8685,8 @@
         </p:nvSpPr>
         <p:spPr>
           <a:xfrm>
-            <a:off x="4002047" y="4575213"/>
-            <a:ext cx="4852610" cy="307777"/>
+            <a:off x="1590329" y="4575213"/>
+            <a:ext cx="7553671" cy="307777"/>
           </a:xfrm>
           <a:prstGeom prst="rect">
             <a:avLst/>
@@ -8491,39 +8699,54 @@
           <a:lstStyle/>
           <a:p>
             <a:r>
+              <a:rPr lang="en-US" altLang="zh-CN" dirty="0"/>
+              <a:t>【</a:t>
+            </a:r>
+            <a:r>
+              <a:rPr lang="zh-CN" altLang="en-US" dirty="0"/>
+              <a:t>模型</a:t>
+            </a:r>
+            <a:r>
+              <a:rPr lang="en-US" altLang="zh-CN" dirty="0"/>
+              <a:t>M</a:t>
+            </a:r>
+            <a:r>
+              <a:rPr lang="zh-CN" altLang="en-US" dirty="0" smtClean="0"/>
+              <a:t>：</a:t>
+            </a:r>
+            <a:r>
+              <a:rPr lang="zh-CN" altLang="en-US" dirty="0"/>
+              <a:t>技术</a:t>
+            </a:r>
+            <a:r>
+              <a:rPr lang="en-US" dirty="0" smtClean="0"/>
+              <a:t>(</a:t>
+            </a:r>
+            <a:r>
+              <a:rPr lang="zh-CN" altLang="en-US" dirty="0" smtClean="0"/>
+              <a:t>信息运行用</a:t>
+            </a:r>
+            <a:r>
+              <a:rPr lang="en-US" dirty="0" smtClean="0"/>
+              <a:t>) </a:t>
+            </a:r>
+            <a:r>
+              <a:rPr lang="en-US" altLang="zh-CN" dirty="0" smtClean="0"/>
+              <a:t>】</a:t>
+            </a:r>
+            <a:r>
+              <a:rPr lang="zh-CN" altLang="en-US" kern="100" dirty="0" smtClean="0">
+                <a:ea typeface="黑体" panose="02010609060101010101" pitchFamily="49" charset="-122"/>
+                <a:cs typeface="Times New Roman" panose="02020603050405020304" pitchFamily="18" charset="0"/>
+              </a:rPr>
+              <a:t>（</a:t>
+            </a:r>
+            <a:r>
               <a:rPr lang="zh-CN" altLang="en-US" kern="100" dirty="0">
                 <a:ea typeface="黑体" panose="02010609060101010101" pitchFamily="49" charset="-122"/>
                 <a:cs typeface="Times New Roman" panose="02020603050405020304" pitchFamily="18" charset="0"/>
               </a:rPr>
-              <a:t>（</a:t>
-            </a:r>
-            <a:r>
-              <a:rPr lang="zh-CN" altLang="en-US" kern="100" dirty="0">
-                <a:ea typeface="黑体" panose="02010609060101010101" pitchFamily="49" charset="-122"/>
-                <a:cs typeface="Times New Roman" panose="02020603050405020304" pitchFamily="18" charset="0"/>
-              </a:rPr>
-              <a:t>思政要素</a:t>
-            </a:r>
-            <a:r>
-              <a:rPr lang="zh-CN" altLang="en-US" kern="100" dirty="0">
-                <a:ea typeface="黑体" panose="02010609060101010101" pitchFamily="49" charset="-122"/>
-                <a:cs typeface="Times New Roman" panose="02020603050405020304" pitchFamily="18" charset="0"/>
-              </a:rPr>
-              <a:t>：</a:t>
-            </a:r>
-            <a:r>
-              <a:rPr lang="zh-CN" altLang="en-US" kern="100" dirty="0">
-                <a:ea typeface="黑体" panose="02010609060101010101" pitchFamily="49" charset="-122"/>
-                <a:cs typeface="Times New Roman" panose="02020603050405020304" pitchFamily="18" charset="0"/>
-              </a:rPr>
-              <a:t>大国工匠、精益求精、工程伦理、科技报国</a:t>
-            </a:r>
-            <a:r>
-              <a:rPr lang="zh-CN" altLang="en-US" kern="100" dirty="0">
-                <a:ea typeface="黑体" panose="02010609060101010101" pitchFamily="49" charset="-122"/>
-                <a:cs typeface="Times New Roman" panose="02020603050405020304" pitchFamily="18" charset="0"/>
-              </a:rPr>
-              <a:t>）</a:t>
+              <a:t>思政要素：大国工匠、精益求精、工程伦理、科技报国）</a:t>
             </a:r>
             <a:endParaRPr lang="en-US" kern="100" dirty="0">
               <a:ea typeface="黑体" panose="02010609060101010101" pitchFamily="49" charset="-122"/>

--- a/wwwroot/1-FourPlatformLevelsofUniversalProgrammingLanguage.pptx
+++ b/wwwroot/1-FourPlatformLevelsofUniversalProgrammingLanguage.pptx
@@ -900,7 +900,55 @@
           <a:bodyPr/>
           <a:lstStyle/>
           <a:p>
-            <a:endParaRPr lang="zh-CN" altLang="en-US"/>
+            <a:r>
+              <a:rPr lang="zh-CN" altLang="en-US" dirty="0" smtClean="0"/>
+              <a:t>第</a:t>
+            </a:r>
+            <a:r>
+              <a:rPr lang="en-US" altLang="zh-CN" dirty="0" smtClean="0"/>
+              <a:t>33</a:t>
+            </a:r>
+            <a:r>
+              <a:rPr lang="zh-CN" altLang="en-US" dirty="0" smtClean="0"/>
+              <a:t>分钟。视图</a:t>
+            </a:r>
+            <a:r>
+              <a:rPr lang="en-US" altLang="zh-CN" dirty="0" smtClean="0"/>
+              <a:t>V</a:t>
+            </a:r>
+            <a:r>
+              <a:rPr lang="zh-CN" altLang="en-US" dirty="0" smtClean="0"/>
+              <a:t>：如上。控制</a:t>
+            </a:r>
+            <a:r>
+              <a:rPr lang="en-US" altLang="zh-CN" dirty="0" smtClean="0"/>
+              <a:t>C</a:t>
+            </a:r>
+            <a:r>
+              <a:rPr lang="zh-CN" altLang="en-US" dirty="0" smtClean="0"/>
+              <a:t>：一对多。模型</a:t>
+            </a:r>
+            <a:r>
+              <a:rPr lang="en-US" altLang="zh-CN" dirty="0" smtClean="0"/>
+              <a:t>M</a:t>
+            </a:r>
+            <a:r>
+              <a:rPr lang="zh-CN" altLang="en-US" dirty="0" smtClean="0"/>
+              <a:t>：人文</a:t>
+            </a:r>
+            <a:r>
+              <a:rPr lang="en-US" dirty="0" smtClean="0"/>
+              <a:t>(</a:t>
+            </a:r>
+            <a:r>
+              <a:rPr lang="zh-CN" altLang="en-US" dirty="0" smtClean="0"/>
+              <a:t>情感交流</a:t>
+            </a:r>
+            <a:r>
+              <a:rPr lang="en-US" dirty="0" smtClean="0"/>
+              <a:t>) </a:t>
+            </a:r>
+            <a:endParaRPr lang="zh-CN" altLang="en-US" dirty="0"/>
           </a:p>
         </p:txBody>
       </p:sp>
@@ -984,7 +1032,55 @@
           <a:bodyPr/>
           <a:lstStyle/>
           <a:p>
-            <a:endParaRPr lang="zh-CN" altLang="en-US"/>
+            <a:r>
+              <a:rPr lang="zh-CN" altLang="en-US" dirty="0" smtClean="0"/>
+              <a:t>第</a:t>
+            </a:r>
+            <a:r>
+              <a:rPr lang="en-US" altLang="zh-CN" dirty="0" smtClean="0"/>
+              <a:t>35</a:t>
+            </a:r>
+            <a:r>
+              <a:rPr lang="zh-CN" altLang="en-US" dirty="0" smtClean="0"/>
+              <a:t>分钟。视图</a:t>
+            </a:r>
+            <a:r>
+              <a:rPr lang="en-US" altLang="zh-CN" dirty="0" smtClean="0"/>
+              <a:t>V</a:t>
+            </a:r>
+            <a:r>
+              <a:rPr lang="zh-CN" altLang="en-US" dirty="0" smtClean="0"/>
+              <a:t>：如上。控制</a:t>
+            </a:r>
+            <a:r>
+              <a:rPr lang="en-US" altLang="zh-CN" dirty="0" smtClean="0"/>
+              <a:t>C</a:t>
+            </a:r>
+            <a:r>
+              <a:rPr lang="zh-CN" altLang="en-US" dirty="0" smtClean="0"/>
+              <a:t>：一对多。模型</a:t>
+            </a:r>
+            <a:r>
+              <a:rPr lang="en-US" altLang="zh-CN" dirty="0" smtClean="0"/>
+              <a:t>M</a:t>
+            </a:r>
+            <a:r>
+              <a:rPr lang="zh-CN" altLang="en-US" dirty="0" smtClean="0"/>
+              <a:t>：哲学</a:t>
+            </a:r>
+            <a:r>
+              <a:rPr lang="en-US" dirty="0" smtClean="0"/>
+              <a:t>(</a:t>
+            </a:r>
+            <a:r>
+              <a:rPr lang="zh-CN" altLang="en-US" dirty="0" smtClean="0"/>
+              <a:t>智能建构</a:t>
+            </a:r>
+            <a:r>
+              <a:rPr lang="en-US" dirty="0" smtClean="0"/>
+              <a:t>) </a:t>
+            </a:r>
+            <a:endParaRPr lang="zh-CN" altLang="en-US" dirty="0"/>
           </a:p>
         </p:txBody>
       </p:sp>
@@ -1068,7 +1164,72 @@
           <a:bodyPr/>
           <a:lstStyle/>
           <a:p>
-            <a:endParaRPr lang="zh-CN" altLang="en-US"/>
+            <a:pPr marL="0" marR="0" lvl="0" indent="0" algn="l" defTabSz="685800" rtl="0" eaLnBrk="1" fontAlgn="auto" latinLnBrk="0" hangingPunct="1">
+              <a:lnSpc>
+                <a:spcPct val="100000"/>
+              </a:lnSpc>
+              <a:spcBef>
+                <a:spcPts val="0"/>
+              </a:spcBef>
+              <a:spcAft>
+                <a:spcPts val="0"/>
+              </a:spcAft>
+              <a:buClrTx/>
+              <a:buSzTx/>
+              <a:buFontTx/>
+              <a:buNone/>
+              <a:tabLst/>
+              <a:defRPr/>
+            </a:pPr>
+            <a:r>
+              <a:rPr lang="zh-CN" altLang="en-US" dirty="0" smtClean="0"/>
+              <a:t>第</a:t>
+            </a:r>
+            <a:r>
+              <a:rPr lang="en-US" altLang="zh-CN" dirty="0" smtClean="0"/>
+              <a:t>37-40</a:t>
+            </a:r>
+            <a:r>
+              <a:rPr lang="zh-CN" altLang="en-US" dirty="0" smtClean="0"/>
+              <a:t>分钟。视图</a:t>
+            </a:r>
+            <a:r>
+              <a:rPr lang="en-US" altLang="zh-CN" dirty="0" smtClean="0"/>
+              <a:t>V</a:t>
+            </a:r>
+            <a:r>
+              <a:rPr lang="zh-CN" altLang="en-US" dirty="0" smtClean="0"/>
+              <a:t>：如上。控制</a:t>
+            </a:r>
+            <a:r>
+              <a:rPr lang="en-US" altLang="zh-CN" dirty="0" smtClean="0"/>
+              <a:t>C</a:t>
+            </a:r>
+            <a:r>
+              <a:rPr lang="zh-CN" altLang="en-US" dirty="0" smtClean="0"/>
+              <a:t>：一对一提问与回答、辅助一对多讲解。模型</a:t>
+            </a:r>
+            <a:r>
+              <a:rPr lang="en-US" altLang="zh-CN" dirty="0" smtClean="0"/>
+              <a:t>M</a:t>
+            </a:r>
+            <a:r>
+              <a:rPr lang="zh-CN" altLang="en-US" dirty="0" smtClean="0"/>
+              <a:t>：实践</a:t>
+            </a:r>
+            <a:r>
+              <a:rPr lang="en-US" dirty="0" smtClean="0"/>
+              <a:t>(</a:t>
+            </a:r>
+            <a:r>
+              <a:rPr lang="zh-CN" altLang="en-US" dirty="0" smtClean="0"/>
+              <a:t>数据读写</a:t>
+            </a:r>
+            <a:r>
+              <a:rPr lang="en-US" dirty="0" smtClean="0"/>
+              <a:t>) </a:t>
+            </a:r>
+            <a:endParaRPr lang="zh-CN" altLang="en-US" dirty="0" smtClean="0"/>
           </a:p>
         </p:txBody>
       </p:sp>
@@ -1236,6 +1397,23 @@
           <a:bodyPr/>
           <a:lstStyle/>
           <a:p>
+            <a:pPr marL="0" marR="0" lvl="0" indent="0" algn="l" defTabSz="685800" rtl="0" eaLnBrk="1" fontAlgn="auto" latinLnBrk="0" hangingPunct="1">
+              <a:lnSpc>
+                <a:spcPct val="100000"/>
+              </a:lnSpc>
+              <a:spcBef>
+                <a:spcPts val="0"/>
+              </a:spcBef>
+              <a:spcAft>
+                <a:spcPts val="0"/>
+              </a:spcAft>
+              <a:buClrTx/>
+              <a:buSzTx/>
+              <a:buFontTx/>
+              <a:buNone/>
+              <a:tabLst/>
+              <a:defRPr/>
+            </a:pPr>
             <a:r>
               <a:rPr lang="zh-CN" altLang="en-US" dirty="0" smtClean="0"/>
               <a:t>第</a:t>
@@ -1246,7 +1424,55 @@
             </a:r>
             <a:r>
               <a:rPr lang="zh-CN" altLang="en-US" dirty="0" smtClean="0"/>
-              <a:t>分钟</a:t>
+              <a:t>分钟；视图</a:t>
+            </a:r>
+            <a:r>
+              <a:rPr lang="en-US" altLang="zh-CN" dirty="0" smtClean="0"/>
+              <a:t>V</a:t>
+            </a:r>
+            <a:r>
+              <a:rPr lang="zh-CN" altLang="en-US" dirty="0" smtClean="0"/>
+              <a:t>：如上。控制</a:t>
+            </a:r>
+            <a:r>
+              <a:rPr lang="en-US" altLang="zh-CN" dirty="0" smtClean="0"/>
+              <a:t>C</a:t>
+            </a:r>
+            <a:r>
+              <a:rPr lang="zh-CN" altLang="en-US" dirty="0" smtClean="0"/>
+              <a:t>：一对多。</a:t>
+            </a:r>
+            <a:r>
+              <a:rPr lang="en-US" altLang="zh-CN" dirty="0" smtClean="0"/>
+              <a:t>【</a:t>
+            </a:r>
+            <a:r>
+              <a:rPr lang="zh-CN" altLang="en-US" dirty="0" smtClean="0"/>
+              <a:t>模型</a:t>
+            </a:r>
+            <a:r>
+              <a:rPr lang="en-US" altLang="zh-CN" dirty="0" smtClean="0"/>
+              <a:t>M</a:t>
+            </a:r>
+            <a:r>
+              <a:rPr lang="zh-CN" altLang="en-US" dirty="0" smtClean="0"/>
+              <a:t>：人文</a:t>
+            </a:r>
+            <a:r>
+              <a:rPr lang="en-US" dirty="0" smtClean="0"/>
+              <a:t>(</a:t>
+            </a:r>
+            <a:r>
+              <a:rPr lang="zh-CN" altLang="en-US" dirty="0" smtClean="0"/>
+              <a:t>情感交流</a:t>
+            </a:r>
+            <a:r>
+              <a:rPr lang="en-US" dirty="0" smtClean="0"/>
+              <a:t>) </a:t>
+            </a:r>
+            <a:r>
+              <a:rPr lang="en-US" altLang="zh-CN" dirty="0" smtClean="0"/>
+              <a:t>】</a:t>
             </a:r>
             <a:endParaRPr lang="zh-CN" altLang="en-US" dirty="0"/>
           </a:p>
@@ -1342,7 +1568,43 @@
             </a:r>
             <a:r>
               <a:rPr lang="zh-CN" altLang="en-US" dirty="0" smtClean="0"/>
-              <a:t>分钟</a:t>
+              <a:t>分钟。视图</a:t>
+            </a:r>
+            <a:r>
+              <a:rPr lang="en-US" altLang="zh-CN" dirty="0" smtClean="0"/>
+              <a:t>V</a:t>
+            </a:r>
+            <a:r>
+              <a:rPr lang="zh-CN" altLang="en-US" dirty="0" smtClean="0"/>
+              <a:t>：如上。控制</a:t>
+            </a:r>
+            <a:r>
+              <a:rPr lang="en-US" altLang="zh-CN" dirty="0" smtClean="0"/>
+              <a:t>C</a:t>
+            </a:r>
+            <a:r>
+              <a:rPr lang="zh-CN" altLang="en-US" dirty="0" smtClean="0"/>
+              <a:t>：一对多。模型</a:t>
+            </a:r>
+            <a:r>
+              <a:rPr lang="en-US" altLang="zh-CN" dirty="0" smtClean="0"/>
+              <a:t>M</a:t>
+            </a:r>
+            <a:r>
+              <a:rPr lang="zh-CN" altLang="en-US" dirty="0" smtClean="0"/>
+              <a:t>：科学</a:t>
+            </a:r>
+            <a:r>
+              <a:rPr lang="en-US" dirty="0" smtClean="0"/>
+              <a:t>(</a:t>
+            </a:r>
+            <a:r>
+              <a:rPr lang="zh-CN" altLang="en-US" dirty="0" smtClean="0"/>
+              <a:t>规律探究</a:t>
+            </a:r>
+            <a:r>
+              <a:rPr lang="en-US" dirty="0" smtClean="0"/>
+              <a:t>) </a:t>
             </a:r>
             <a:endParaRPr lang="zh-CN" altLang="en-US" dirty="0"/>
           </a:p>
@@ -1438,7 +1700,47 @@
             </a:r>
             <a:r>
               <a:rPr lang="zh-CN" altLang="en-US" dirty="0" smtClean="0"/>
-              <a:t>分钟</a:t>
+              <a:t>分钟。视图</a:t>
+            </a:r>
+            <a:r>
+              <a:rPr lang="en-US" altLang="zh-CN" dirty="0" smtClean="0"/>
+              <a:t>V</a:t>
+            </a:r>
+            <a:r>
+              <a:rPr lang="zh-CN" altLang="en-US" dirty="0" smtClean="0"/>
+              <a:t>：如上。控制</a:t>
+            </a:r>
+            <a:r>
+              <a:rPr lang="en-US" altLang="zh-CN" dirty="0" smtClean="0"/>
+              <a:t>C</a:t>
+            </a:r>
+            <a:r>
+              <a:rPr lang="zh-CN" altLang="en-US" dirty="0" smtClean="0"/>
+              <a:t>：一对多。模型</a:t>
+            </a:r>
+            <a:r>
+              <a:rPr lang="en-US" altLang="zh-CN" dirty="0" smtClean="0"/>
+              <a:t>M</a:t>
+            </a:r>
+            <a:r>
+              <a:rPr lang="zh-CN" altLang="en-US" dirty="0" smtClean="0"/>
+              <a:t>：实践</a:t>
+            </a:r>
+            <a:r>
+              <a:rPr lang="en-US" dirty="0" smtClean="0"/>
+              <a:t>(</a:t>
+            </a:r>
+            <a:r>
+              <a:rPr lang="zh-CN" altLang="en-US" dirty="0" smtClean="0"/>
+              <a:t>数据读写</a:t>
+            </a:r>
+            <a:r>
+              <a:rPr lang="en-US" dirty="0" smtClean="0"/>
+              <a:t>) </a:t>
+            </a:r>
+            <a:r>
+              <a:rPr lang="zh-CN" altLang="en-US" dirty="0" smtClean="0"/>
+              <a:t>。</a:t>
             </a:r>
             <a:endParaRPr lang="zh-CN" altLang="en-US" dirty="0"/>
           </a:p>
@@ -1870,7 +2172,43 @@
             </a:r>
             <a:r>
               <a:rPr lang="zh-CN" altLang="en-US" dirty="0" smtClean="0"/>
-              <a:t>分钟</a:t>
+              <a:t>分钟。视图</a:t>
+            </a:r>
+            <a:r>
+              <a:rPr lang="en-US" altLang="zh-CN" dirty="0" smtClean="0"/>
+              <a:t>V</a:t>
+            </a:r>
+            <a:r>
+              <a:rPr lang="zh-CN" altLang="en-US" dirty="0" smtClean="0"/>
+              <a:t>：如上。控制</a:t>
+            </a:r>
+            <a:r>
+              <a:rPr lang="en-US" altLang="zh-CN" dirty="0" smtClean="0"/>
+              <a:t>C</a:t>
+            </a:r>
+            <a:r>
+              <a:rPr lang="zh-CN" altLang="en-US" dirty="0" smtClean="0"/>
+              <a:t>：一对多。模型</a:t>
+            </a:r>
+            <a:r>
+              <a:rPr lang="en-US" altLang="zh-CN" dirty="0" smtClean="0"/>
+              <a:t>M</a:t>
+            </a:r>
+            <a:r>
+              <a:rPr lang="zh-CN" altLang="en-US" dirty="0" smtClean="0"/>
+              <a:t>：技术</a:t>
+            </a:r>
+            <a:r>
+              <a:rPr lang="en-US" dirty="0" smtClean="0"/>
+              <a:t>(</a:t>
+            </a:r>
+            <a:r>
+              <a:rPr lang="zh-CN" altLang="en-US" dirty="0" smtClean="0"/>
+              <a:t>信息运用</a:t>
+            </a:r>
+            <a:r>
+              <a:rPr lang="en-US" dirty="0" smtClean="0"/>
+              <a:t>) </a:t>
             </a:r>
             <a:endParaRPr lang="zh-CN" altLang="en-US" dirty="0"/>
           </a:p>
@@ -4941,7 +5279,7 @@
         </p:nvSpPr>
         <p:spPr>
           <a:xfrm>
-            <a:off x="3452775" y="4431321"/>
+            <a:off x="5727803" y="4485579"/>
             <a:ext cx="5210484" cy="307777"/>
           </a:xfrm>
           <a:prstGeom prst="rect">
@@ -4955,38 +5293,6 @@
           <a:lstStyle/>
           <a:p>
             <a:r>
-              <a:rPr lang="en-US" altLang="zh-CN" dirty="0"/>
-              <a:t>【</a:t>
-            </a:r>
-            <a:r>
-              <a:rPr lang="zh-CN" altLang="en-US" dirty="0"/>
-              <a:t>模型</a:t>
-            </a:r>
-            <a:r>
-              <a:rPr lang="en-US" altLang="zh-CN" dirty="0"/>
-              <a:t>M</a:t>
-            </a:r>
-            <a:r>
-              <a:rPr lang="zh-CN" altLang="en-US" dirty="0"/>
-              <a:t>：人文</a:t>
-            </a:r>
-            <a:r>
-              <a:rPr lang="en-US" dirty="0"/>
-              <a:t>(</a:t>
-            </a:r>
-            <a:r>
-              <a:rPr lang="zh-CN" altLang="en-US" dirty="0"/>
-              <a:t>情感交流</a:t>
-            </a:r>
-            <a:r>
-              <a:rPr lang="en-US" dirty="0"/>
-              <a:t>) </a:t>
-            </a:r>
-            <a:r>
-              <a:rPr lang="en-US" altLang="zh-CN" dirty="0"/>
-              <a:t>】 </a:t>
-            </a:r>
-            <a:r>
               <a:rPr lang="zh-CN" altLang="en-US" kern="100" dirty="0" smtClean="0">
                 <a:latin typeface="Calibri" panose="020F0502020204030204" pitchFamily="34" charset="0"/>
                 <a:ea typeface="宋体" panose="02010600030101010101" pitchFamily="2" charset="-122"/>
@@ -4995,11 +5301,18 @@
               <a:t>（</a:t>
             </a:r>
             <a:r>
+              <a:rPr lang="zh-CN" altLang="en-US" kern="100" dirty="0" smtClean="0">
+                <a:ea typeface="黑体" panose="02010609060101010101" pitchFamily="49" charset="-122"/>
+                <a:cs typeface="Times New Roman" panose="02020603050405020304" pitchFamily="18" charset="0"/>
+              </a:rPr>
+              <a:t>思</a:t>
+            </a:r>
+            <a:r>
               <a:rPr lang="zh-CN" altLang="en-US" kern="100" dirty="0">
                 <a:ea typeface="黑体" panose="02010609060101010101" pitchFamily="49" charset="-122"/>
                 <a:cs typeface="Times New Roman" panose="02020603050405020304" pitchFamily="18" charset="0"/>
               </a:rPr>
-              <a:t>思政要素：国家情怀、文化自信</a:t>
+              <a:t>政要素：国家情怀、文化自信</a:t>
             </a:r>
             <a:r>
               <a:rPr lang="zh-CN" altLang="en-US" kern="100" dirty="0" smtClean="0">
@@ -5332,8 +5645,8 @@
         </p:nvSpPr>
         <p:spPr>
           <a:xfrm>
-            <a:off x="3562581" y="425335"/>
-            <a:ext cx="5399235" cy="307777"/>
+            <a:off x="5745106" y="323736"/>
+            <a:ext cx="3057247" cy="307777"/>
           </a:xfrm>
           <a:prstGeom prst="rect">
             <a:avLst/>
@@ -5345,42 +5658,6 @@
           </a:bodyPr>
           <a:lstStyle/>
           <a:p>
-            <a:r>
-              <a:rPr lang="en-US" altLang="zh-CN" dirty="0"/>
-              <a:t>【</a:t>
-            </a:r>
-            <a:r>
-              <a:rPr lang="zh-CN" altLang="en-US" dirty="0"/>
-              <a:t>模型</a:t>
-            </a:r>
-            <a:r>
-              <a:rPr lang="en-US" altLang="zh-CN" dirty="0"/>
-              <a:t>M</a:t>
-            </a:r>
-            <a:r>
-              <a:rPr lang="zh-CN" altLang="en-US" dirty="0" smtClean="0"/>
-              <a:t>：</a:t>
-            </a:r>
-            <a:r>
-              <a:rPr lang="zh-CN" altLang="en-US" dirty="0"/>
-              <a:t>哲学</a:t>
-            </a:r>
-            <a:r>
-              <a:rPr lang="en-US" dirty="0" smtClean="0"/>
-              <a:t>(</a:t>
-            </a:r>
-            <a:r>
-              <a:rPr lang="zh-CN" altLang="en-US" dirty="0" smtClean="0"/>
-              <a:t>智能建构</a:t>
-            </a:r>
-            <a:r>
-              <a:rPr lang="en-US" dirty="0" smtClean="0"/>
-              <a:t>) </a:t>
-            </a:r>
-            <a:r>
-              <a:rPr lang="en-US" altLang="zh-CN" dirty="0" smtClean="0"/>
-              <a:t>】</a:t>
-            </a:r>
             <a:r>
               <a:rPr lang="zh-CN" altLang="en-US" kern="100" dirty="0" smtClean="0">
                 <a:latin typeface="Calibri" panose="020F0502020204030204" pitchFamily="34" charset="0"/>
@@ -5512,7 +5789,7 @@
           <p:cNvPr id="2" name="文本框 1">
             <a:extLst>
               <a:ext uri="{FF2B5EF4-FFF2-40B4-BE49-F238E27FC236}">
-                <a16:creationId xmlns:a16="http://schemas.microsoft.com/office/drawing/2014/main" xmlns="" id="{438813D7-676E-4BB1-8BD1-AA790C109740}"/>
+                <a16:creationId xmlns="" xmlns:a16="http://schemas.microsoft.com/office/drawing/2014/main" id="{438813D7-676E-4BB1-8BD1-AA790C109740}"/>
               </a:ext>
             </a:extLst>
           </p:cNvPr>
@@ -5521,7 +5798,7 @@
         </p:nvSpPr>
         <p:spPr>
           <a:xfrm>
-            <a:off x="2670047" y="4551431"/>
+            <a:off x="4864607" y="4514855"/>
             <a:ext cx="6291428" cy="307777"/>
           </a:xfrm>
           <a:prstGeom prst="rect">
@@ -5535,38 +5812,6 @@
           </a:bodyPr>
           <a:lstStyle/>
           <a:p>
-            <a:r>
-              <a:rPr lang="en-US" altLang="zh-CN" dirty="0"/>
-              <a:t>【</a:t>
-            </a:r>
-            <a:r>
-              <a:rPr lang="zh-CN" altLang="en-US" dirty="0"/>
-              <a:t>模型</a:t>
-            </a:r>
-            <a:r>
-              <a:rPr lang="en-US" altLang="zh-CN" dirty="0"/>
-              <a:t>M</a:t>
-            </a:r>
-            <a:r>
-              <a:rPr lang="zh-CN" altLang="en-US" dirty="0"/>
-              <a:t>：实践</a:t>
-            </a:r>
-            <a:r>
-              <a:rPr lang="en-US" dirty="0"/>
-              <a:t>(</a:t>
-            </a:r>
-            <a:r>
-              <a:rPr lang="zh-CN" altLang="en-US" dirty="0"/>
-              <a:t>数据读写</a:t>
-            </a:r>
-            <a:r>
-              <a:rPr lang="en-US" dirty="0"/>
-              <a:t>) </a:t>
-            </a:r>
-            <a:r>
-              <a:rPr lang="en-US" altLang="zh-CN" dirty="0" smtClean="0"/>
-              <a:t>】</a:t>
-            </a:r>
             <a:r>
               <a:rPr lang="zh-CN" altLang="en-US" dirty="0" smtClean="0"/>
               <a:t>（</a:t>
@@ -6171,7 +6416,7 @@
           <a:graphicData uri="http://schemas.openxmlformats.org/presentationml/2006/ole">
             <mc:AlternateContent xmlns:mc="http://schemas.openxmlformats.org/markup-compatibility/2006">
               <mc:Choice xmlns:v="urn:schemas-microsoft-com:vml" Requires="v">
-                <p:oleObj spid="_x0000_s4116" name="Picture" r:id="rId3" imgW="2441520" imgH="3979440" progId="Word.Picture.8">
+                <p:oleObj spid="_x0000_s4124" name="Picture" r:id="rId3" imgW="2441520" imgH="3979440" progId="Word.Picture.8">
                   <p:embed/>
                 </p:oleObj>
               </mc:Choice>
@@ -6363,8 +6608,8 @@
         </p:nvSpPr>
         <p:spPr>
           <a:xfrm>
-            <a:off x="3445459" y="4611588"/>
-            <a:ext cx="5265164" cy="307777"/>
+            <a:off x="5786323" y="4611588"/>
+            <a:ext cx="2924300" cy="307777"/>
           </a:xfrm>
           <a:prstGeom prst="rect">
             <a:avLst/>
@@ -6376,42 +6621,6 @@
           </a:bodyPr>
           <a:lstStyle/>
           <a:p>
-            <a:r>
-              <a:rPr lang="en-US" altLang="zh-CN" dirty="0"/>
-              <a:t>【</a:t>
-            </a:r>
-            <a:r>
-              <a:rPr lang="zh-CN" altLang="en-US" dirty="0"/>
-              <a:t>模型</a:t>
-            </a:r>
-            <a:r>
-              <a:rPr lang="en-US" altLang="zh-CN" dirty="0"/>
-              <a:t>M</a:t>
-            </a:r>
-            <a:r>
-              <a:rPr lang="zh-CN" altLang="en-US" dirty="0" smtClean="0"/>
-              <a:t>：</a:t>
-            </a:r>
-            <a:r>
-              <a:rPr lang="zh-CN" altLang="en-US" dirty="0"/>
-              <a:t>人文</a:t>
-            </a:r>
-            <a:r>
-              <a:rPr lang="en-US" dirty="0" smtClean="0"/>
-              <a:t>(</a:t>
-            </a:r>
-            <a:r>
-              <a:rPr lang="zh-CN" altLang="en-US" dirty="0" smtClean="0"/>
-              <a:t>情感交流</a:t>
-            </a:r>
-            <a:r>
-              <a:rPr lang="en-US" dirty="0" smtClean="0"/>
-              <a:t>) </a:t>
-            </a:r>
-            <a:r>
-              <a:rPr lang="en-US" altLang="zh-CN" dirty="0"/>
-              <a:t>】 </a:t>
-            </a:r>
             <a:r>
               <a:rPr lang="zh-CN" altLang="en-US" kern="100" dirty="0" smtClean="0">
                 <a:latin typeface="Calibri" panose="020F0502020204030204" pitchFamily="34" charset="0"/>
@@ -6971,7 +7180,7 @@
           <a:graphicData uri="http://schemas.openxmlformats.org/presentationml/2006/ole">
             <mc:AlternateContent xmlns:mc="http://schemas.openxmlformats.org/markup-compatibility/2006">
               <mc:Choice xmlns:v="urn:schemas-microsoft-com:vml" Requires="v">
-                <p:oleObj spid="_x0000_s2084" name="Picture" r:id="rId4" imgW="2441520" imgH="3979440" progId="Word.Picture.8">
+                <p:oleObj spid="_x0000_s2092" name="Picture" r:id="rId4" imgW="2441520" imgH="3979440" progId="Word.Picture.8">
                   <p:embed/>
                 </p:oleObj>
               </mc:Choice>
@@ -7049,7 +7258,7 @@
         </p:nvSpPr>
         <p:spPr>
           <a:xfrm>
-            <a:off x="2384820" y="4601603"/>
+            <a:off x="4540250" y="4647643"/>
             <a:ext cx="6676058" cy="307777"/>
           </a:xfrm>
           <a:prstGeom prst="rect">
@@ -7063,38 +7272,6 @@
           <a:lstStyle/>
           <a:p>
             <a:r>
-              <a:rPr lang="en-US" altLang="zh-CN" dirty="0" smtClean="0"/>
-              <a:t>【</a:t>
-            </a:r>
-            <a:r>
-              <a:rPr lang="zh-CN" altLang="en-US" dirty="0" smtClean="0"/>
-              <a:t>模型</a:t>
-            </a:r>
-            <a:r>
-              <a:rPr lang="en-US" altLang="zh-CN" dirty="0" smtClean="0"/>
-              <a:t>M</a:t>
-            </a:r>
-            <a:r>
-              <a:rPr lang="zh-CN" altLang="en-US" dirty="0" smtClean="0"/>
-              <a:t>：科学</a:t>
-            </a:r>
-            <a:r>
-              <a:rPr lang="en-US" dirty="0"/>
-              <a:t>(</a:t>
-            </a:r>
-            <a:r>
-              <a:rPr lang="zh-CN" altLang="en-US" dirty="0"/>
-              <a:t>规律探究</a:t>
-            </a:r>
-            <a:r>
-              <a:rPr lang="en-US" dirty="0" smtClean="0"/>
-              <a:t>) </a:t>
-            </a:r>
-            <a:r>
-              <a:rPr lang="en-US" altLang="zh-CN" dirty="0" smtClean="0"/>
-              <a:t>】</a:t>
-            </a:r>
-            <a:r>
               <a:rPr lang="zh-CN" altLang="en-US" kern="100" dirty="0" smtClean="0">
                 <a:latin typeface="Calibri" panose="020F0502020204030204" pitchFamily="34" charset="0"/>
                 <a:ea typeface="宋体" panose="02010600030101010101" pitchFamily="2" charset="-122"/>
@@ -7103,11 +7280,18 @@
               <a:t>（</a:t>
             </a:r>
             <a:r>
+              <a:rPr lang="zh-CN" altLang="en-US" kern="100" dirty="0" smtClean="0">
+                <a:ea typeface="黑体" panose="02010609060101010101" pitchFamily="49" charset="-122"/>
+                <a:cs typeface="Times New Roman" panose="02020603050405020304" pitchFamily="18" charset="0"/>
+              </a:rPr>
+              <a:t>思</a:t>
+            </a:r>
+            <a:r>
               <a:rPr lang="zh-CN" altLang="en-US" kern="100" dirty="0">
                 <a:ea typeface="黑体" panose="02010609060101010101" pitchFamily="49" charset="-122"/>
                 <a:cs typeface="Times New Roman" panose="02020603050405020304" pitchFamily="18" charset="0"/>
               </a:rPr>
-              <a:t>思政要素：正确认识问题、分析问题、</a:t>
+              <a:t>政要素：正确认识问题、分析问题、</a:t>
             </a:r>
             <a:r>
               <a:rPr lang="zh-CN" altLang="en-US" kern="100" dirty="0" smtClean="0">
@@ -7703,8 +7887,8 @@
         </p:nvSpPr>
         <p:spPr>
           <a:xfrm>
-            <a:off x="3497456" y="4394039"/>
-            <a:ext cx="5578771" cy="307777"/>
+            <a:off x="5636994" y="4394039"/>
+            <a:ext cx="3057247" cy="307777"/>
           </a:xfrm>
           <a:prstGeom prst="rect">
             <a:avLst/>
@@ -7716,42 +7900,6 @@
           </a:bodyPr>
           <a:lstStyle/>
           <a:p>
-            <a:r>
-              <a:rPr lang="en-US" altLang="zh-CN" dirty="0"/>
-              <a:t>【</a:t>
-            </a:r>
-            <a:r>
-              <a:rPr lang="zh-CN" altLang="en-US" dirty="0"/>
-              <a:t>模型</a:t>
-            </a:r>
-            <a:r>
-              <a:rPr lang="en-US" altLang="zh-CN" dirty="0"/>
-              <a:t>M</a:t>
-            </a:r>
-            <a:r>
-              <a:rPr lang="zh-CN" altLang="en-US" dirty="0" smtClean="0"/>
-              <a:t>：</a:t>
-            </a:r>
-            <a:r>
-              <a:rPr lang="zh-CN" altLang="en-US" dirty="0"/>
-              <a:t>实践</a:t>
-            </a:r>
-            <a:r>
-              <a:rPr lang="en-US" dirty="0" smtClean="0"/>
-              <a:t>(</a:t>
-            </a:r>
-            <a:r>
-              <a:rPr lang="zh-CN" altLang="en-US" dirty="0" smtClean="0"/>
-              <a:t>数据读写</a:t>
-            </a:r>
-            <a:r>
-              <a:rPr lang="en-US" dirty="0" smtClean="0"/>
-              <a:t>) </a:t>
-            </a:r>
-            <a:r>
-              <a:rPr lang="en-US" altLang="zh-CN" dirty="0"/>
-              <a:t>】 </a:t>
-            </a:r>
             <a:r>
               <a:rPr lang="zh-CN" altLang="en-US" kern="100" dirty="0" smtClean="0">
                 <a:latin typeface="Calibri" panose="020F0502020204030204" pitchFamily="34" charset="0"/>
@@ -8685,8 +8833,8 @@
         </p:nvSpPr>
         <p:spPr>
           <a:xfrm>
-            <a:off x="1590329" y="4575213"/>
-            <a:ext cx="7553671" cy="307777"/>
+            <a:off x="4001249" y="4514180"/>
+            <a:ext cx="4852610" cy="307777"/>
           </a:xfrm>
           <a:prstGeom prst="rect">
             <a:avLst/>
@@ -8698,42 +8846,6 @@
           </a:bodyPr>
           <a:lstStyle/>
           <a:p>
-            <a:r>
-              <a:rPr lang="en-US" altLang="zh-CN" dirty="0"/>
-              <a:t>【</a:t>
-            </a:r>
-            <a:r>
-              <a:rPr lang="zh-CN" altLang="en-US" dirty="0"/>
-              <a:t>模型</a:t>
-            </a:r>
-            <a:r>
-              <a:rPr lang="en-US" altLang="zh-CN" dirty="0"/>
-              <a:t>M</a:t>
-            </a:r>
-            <a:r>
-              <a:rPr lang="zh-CN" altLang="en-US" dirty="0" smtClean="0"/>
-              <a:t>：</a:t>
-            </a:r>
-            <a:r>
-              <a:rPr lang="zh-CN" altLang="en-US" dirty="0"/>
-              <a:t>技术</a:t>
-            </a:r>
-            <a:r>
-              <a:rPr lang="en-US" dirty="0" smtClean="0"/>
-              <a:t>(</a:t>
-            </a:r>
-            <a:r>
-              <a:rPr lang="zh-CN" altLang="en-US" dirty="0" smtClean="0"/>
-              <a:t>信息运行用</a:t>
-            </a:r>
-            <a:r>
-              <a:rPr lang="en-US" dirty="0" smtClean="0"/>
-              <a:t>) </a:t>
-            </a:r>
-            <a:r>
-              <a:rPr lang="en-US" altLang="zh-CN" dirty="0" smtClean="0"/>
-              <a:t>】</a:t>
-            </a:r>
             <a:r>
               <a:rPr lang="zh-CN" altLang="en-US" kern="100" dirty="0" smtClean="0">
                 <a:ea typeface="黑体" panose="02010609060101010101" pitchFamily="49" charset="-122"/>

--- a/wwwroot/1-FourPlatformLevelsofUniversalProgrammingLanguage.pptx
+++ b/wwwroot/1-FourPlatformLevelsofUniversalProgrammingLanguage.pptx
@@ -1440,15 +1440,7 @@
             </a:r>
             <a:r>
               <a:rPr lang="zh-CN" altLang="en-US" dirty="0" smtClean="0"/>
-              <a:t>：一对多。</a:t>
-            </a:r>
-            <a:r>
-              <a:rPr lang="en-US" altLang="zh-CN" dirty="0" smtClean="0"/>
-              <a:t>【</a:t>
-            </a:r>
-            <a:r>
-              <a:rPr lang="zh-CN" altLang="en-US" dirty="0" smtClean="0"/>
-              <a:t>模型</a:t>
+              <a:t>：一对多。模型</a:t>
             </a:r>
             <a:r>
               <a:rPr lang="en-US" altLang="zh-CN" dirty="0" smtClean="0"/>
@@ -1467,12 +1459,8 @@
               <a:t>情感交流</a:t>
             </a:r>
             <a:r>
-              <a:rPr lang="en-US" dirty="0" smtClean="0"/>
+              <a:rPr lang="en-US" smtClean="0"/>
               <a:t>) </a:t>
-            </a:r>
-            <a:r>
-              <a:rPr lang="en-US" altLang="zh-CN" dirty="0" smtClean="0"/>
-              <a:t>】</a:t>
             </a:r>
             <a:endParaRPr lang="zh-CN" altLang="en-US" dirty="0"/>
           </a:p>
@@ -6416,7 +6404,7 @@
           <a:graphicData uri="http://schemas.openxmlformats.org/presentationml/2006/ole">
             <mc:AlternateContent xmlns:mc="http://schemas.openxmlformats.org/markup-compatibility/2006">
               <mc:Choice xmlns:v="urn:schemas-microsoft-com:vml" Requires="v">
-                <p:oleObj spid="_x0000_s4124" name="Picture" r:id="rId3" imgW="2441520" imgH="3979440" progId="Word.Picture.8">
+                <p:oleObj spid="_x0000_s4125" name="Picture" r:id="rId3" imgW="2441520" imgH="3979440" progId="Word.Picture.8">
                   <p:embed/>
                 </p:oleObj>
               </mc:Choice>
@@ -6521,6 +6509,13 @@
       </p:transition>
     </mc:Fallback>
   </mc:AlternateContent>
+  <p:timing>
+    <p:tnLst>
+      <p:par>
+        <p:cTn id="1" dur="indefinite" restart="never" nodeType="tmRoot"/>
+      </p:par>
+    </p:tnLst>
+  </p:timing>
 </p:sld>
 </file>
 
@@ -7180,7 +7175,7 @@
           <a:graphicData uri="http://schemas.openxmlformats.org/presentationml/2006/ole">
             <mc:AlternateContent xmlns:mc="http://schemas.openxmlformats.org/markup-compatibility/2006">
               <mc:Choice xmlns:v="urn:schemas-microsoft-com:vml" Requires="v">
-                <p:oleObj spid="_x0000_s2092" name="Picture" r:id="rId4" imgW="2441520" imgH="3979440" progId="Word.Picture.8">
+                <p:oleObj spid="_x0000_s2093" name="Picture" r:id="rId4" imgW="2441520" imgH="3979440" progId="Word.Picture.8">
                   <p:embed/>
                 </p:oleObj>
               </mc:Choice>
